--- a/Healthcare_Analytics_for_Doctor_Visits (SRM).pptx
+++ b/Healthcare_Analytics_for_Doctor_Visits (SRM).pptx
@@ -11157,42 +11157,6 @@
       </p:pic>
       <p:sp>
         <p:nvSpPr>
-          <p:cNvPr id="4" name="Title 3">
-            <a:extLst>
-              <a:ext uri="{FF2B5EF4-FFF2-40B4-BE49-F238E27FC236}">
-                <a16:creationId xmlns:a16="http://schemas.microsoft.com/office/drawing/2014/main" id="{E391E224-B855-9C30-97CF-BF92855CB030}"/>
-              </a:ext>
-            </a:extLst>
-          </p:cNvPr>
-          <p:cNvSpPr>
-            <a:spLocks noGrp="1"/>
-          </p:cNvSpPr>
-          <p:nvPr>
-            <p:ph type="title"/>
-          </p:nvPr>
-        </p:nvSpPr>
-        <p:spPr>
-          <a:xfrm>
-            <a:off x="675957" y="370589"/>
-            <a:ext cx="2981643" cy="830997"/>
-          </a:xfrm>
-        </p:spPr>
-        <p:txBody>
-          <a:bodyPr>
-            <a:normAutofit/>
-          </a:bodyPr>
-          <a:lstStyle/>
-          <a:p>
-            <a:r>
-              <a:rPr lang="en-GB" dirty="0"/>
-              <a:t>RESULTS </a:t>
-            </a:r>
-            <a:endParaRPr lang="en-IN" dirty="0"/>
-          </a:p>
-        </p:txBody>
-      </p:sp>
-      <p:sp>
-        <p:nvSpPr>
           <p:cNvPr id="7" name="Text Placeholder 30">
             <a:extLst>
               <a:ext uri="{FF2B5EF4-FFF2-40B4-BE49-F238E27FC236}">
@@ -11717,7 +11681,7 @@
         </p:nvSpPr>
         <p:spPr>
           <a:xfrm>
-            <a:off x="881001" y="1290618"/>
+            <a:off x="809284" y="415134"/>
             <a:ext cx="6140824" cy="400110"/>
           </a:xfrm>
           <a:prstGeom prst="rect">
@@ -11838,8 +11802,8 @@
         </p:blipFill>
         <p:spPr bwMode="auto">
           <a:xfrm>
-            <a:off x="1747518" y="1858945"/>
-            <a:ext cx="5737997" cy="4298825"/>
+            <a:off x="1675800" y="998952"/>
+            <a:ext cx="6473118" cy="4849567"/>
           </a:xfrm>
           <a:prstGeom prst="rect">
             <a:avLst/>
@@ -11953,118 +11917,19 @@
                             </p:stCondLst>
                             <p:childTnLst>
                               <p:par>
-                                <p:cTn id="5" presetID="53" presetClass="entr" presetSubtype="16" fill="hold" grpId="0" nodeType="clickEffect">
-                                  <p:stCondLst>
-                                    <p:cond delay="0"/>
-                                  </p:stCondLst>
-                                  <p:childTnLst>
-                                    <p:set>
-                                      <p:cBhvr>
-                                        <p:cTn id="6" dur="1" fill="hold">
-                                          <p:stCondLst>
-                                            <p:cond delay="0"/>
-                                          </p:stCondLst>
-                                        </p:cTn>
-                                        <p:tgtEl>
-                                          <p:spTgt spid="4"/>
-                                        </p:tgtEl>
-                                        <p:attrNameLst>
-                                          <p:attrName>style.visibility</p:attrName>
-                                        </p:attrNameLst>
-                                      </p:cBhvr>
-                                      <p:to>
-                                        <p:strVal val="visible"/>
-                                      </p:to>
-                                    </p:set>
-                                    <p:anim calcmode="lin" valueType="num">
-                                      <p:cBhvr>
-                                        <p:cTn id="7" dur="500" fill="hold"/>
-                                        <p:tgtEl>
-                                          <p:spTgt spid="4"/>
-                                        </p:tgtEl>
-                                        <p:attrNameLst>
-                                          <p:attrName>ppt_w</p:attrName>
-                                        </p:attrNameLst>
-                                      </p:cBhvr>
-                                      <p:tavLst>
-                                        <p:tav tm="0">
-                                          <p:val>
-                                            <p:fltVal val="0"/>
-                                          </p:val>
-                                        </p:tav>
-                                        <p:tav tm="100000">
-                                          <p:val>
-                                            <p:strVal val="#ppt_w"/>
-                                          </p:val>
-                                        </p:tav>
-                                      </p:tavLst>
-                                    </p:anim>
-                                    <p:anim calcmode="lin" valueType="num">
-                                      <p:cBhvr>
-                                        <p:cTn id="8" dur="500" fill="hold"/>
-                                        <p:tgtEl>
-                                          <p:spTgt spid="4"/>
-                                        </p:tgtEl>
-                                        <p:attrNameLst>
-                                          <p:attrName>ppt_h</p:attrName>
-                                        </p:attrNameLst>
-                                      </p:cBhvr>
-                                      <p:tavLst>
-                                        <p:tav tm="0">
-                                          <p:val>
-                                            <p:fltVal val="0"/>
-                                          </p:val>
-                                        </p:tav>
-                                        <p:tav tm="100000">
-                                          <p:val>
-                                            <p:strVal val="#ppt_h"/>
-                                          </p:val>
-                                        </p:tav>
-                                      </p:tavLst>
-                                    </p:anim>
-                                    <p:animEffect transition="in" filter="fade">
-                                      <p:cBhvr>
-                                        <p:cTn id="9" dur="500"/>
-                                        <p:tgtEl>
-                                          <p:spTgt spid="4"/>
-                                        </p:tgtEl>
-                                      </p:cBhvr>
-                                    </p:animEffect>
-                                  </p:childTnLst>
-                                </p:cTn>
-                              </p:par>
-                            </p:childTnLst>
-                          </p:cTn>
-                        </p:par>
-                      </p:childTnLst>
-                    </p:cTn>
-                  </p:par>
-                  <p:par>
-                    <p:cTn id="10" fill="hold">
-                      <p:stCondLst>
-                        <p:cond delay="indefinite"/>
-                      </p:stCondLst>
-                      <p:childTnLst>
-                        <p:par>
-                          <p:cTn id="11" fill="hold">
-                            <p:stCondLst>
-                              <p:cond delay="0"/>
-                            </p:stCondLst>
-                            <p:childTnLst>
-                              <p:par>
-                                <p:cTn id="12" presetID="42" presetClass="entr" presetSubtype="0" fill="hold" grpId="0" nodeType="clickEffect" nodePh="1">
+                                <p:cTn id="5" presetID="42" presetClass="entr" presetSubtype="0" fill="hold" grpId="0" nodeType="clickEffect" nodePh="1">
                                   <p:stCondLst>
                                     <p:cond delay="0"/>
                                   </p:stCondLst>
                                   <p:endCondLst>
                                     <p:cond evt="begin" delay="0">
-                                      <p:tn val="12"/>
+                                      <p:tn val="5"/>
                                     </p:cond>
                                   </p:endCondLst>
                                   <p:childTnLst>
                                     <p:set>
                                       <p:cBhvr>
-                                        <p:cTn id="13" dur="1" fill="hold">
+                                        <p:cTn id="6" dur="1" fill="hold">
                                           <p:stCondLst>
                                             <p:cond delay="0"/>
                                           </p:stCondLst>
@@ -12082,7 +11947,7 @@
                                     </p:set>
                                     <p:animEffect transition="in" filter="fade">
                                       <p:cBhvr>
-                                        <p:cTn id="14" dur="1000"/>
+                                        <p:cTn id="7" dur="1000"/>
                                         <p:tgtEl>
                                           <p:spTgt spid="8"/>
                                         </p:tgtEl>
@@ -12090,7 +11955,7 @@
                                     </p:animEffect>
                                     <p:anim calcmode="lin" valueType="num">
                                       <p:cBhvr>
-                                        <p:cTn id="15" dur="1000" fill="hold"/>
+                                        <p:cTn id="8" dur="1000" fill="hold"/>
                                         <p:tgtEl>
                                           <p:spTgt spid="8"/>
                                         </p:tgtEl>
@@ -12113,7 +11978,7 @@
                                     </p:anim>
                                     <p:anim calcmode="lin" valueType="num">
                                       <p:cBhvr>
-                                        <p:cTn id="16" dur="1000" fill="hold"/>
+                                        <p:cTn id="9" dur="1000" fill="hold"/>
                                         <p:tgtEl>
                                           <p:spTgt spid="8"/>
                                         </p:tgtEl>
@@ -12165,7 +12030,6 @@
       </p:par>
     </p:tnLst>
     <p:bldLst>
-      <p:bldP spid="4" grpId="0"/>
       <p:bldP spid="8" grpId="0"/>
     </p:bldLst>
   </p:timing>
@@ -18779,7 +18643,7 @@
         <p:spPr bwMode="auto">
           <a:xfrm>
             <a:off x="1057834" y="2044450"/>
-            <a:ext cx="6391837" cy="3813127"/>
+            <a:ext cx="6866636" cy="4096374"/>
           </a:xfrm>
           <a:prstGeom prst="rect">
             <a:avLst/>
@@ -19210,42 +19074,6 @@
       </p:pic>
       <p:sp>
         <p:nvSpPr>
-          <p:cNvPr id="4" name="Title 3">
-            <a:extLst>
-              <a:ext uri="{FF2B5EF4-FFF2-40B4-BE49-F238E27FC236}">
-                <a16:creationId xmlns:a16="http://schemas.microsoft.com/office/drawing/2014/main" id="{262E4AA1-38E9-A2B1-77C1-4FCE8B6E741C}"/>
-              </a:ext>
-            </a:extLst>
-          </p:cNvPr>
-          <p:cNvSpPr>
-            <a:spLocks noGrp="1"/>
-          </p:cNvSpPr>
-          <p:nvPr>
-            <p:ph type="title"/>
-          </p:nvPr>
-        </p:nvSpPr>
-        <p:spPr>
-          <a:xfrm>
-            <a:off x="675957" y="370589"/>
-            <a:ext cx="2981643" cy="830997"/>
-          </a:xfrm>
-        </p:spPr>
-        <p:txBody>
-          <a:bodyPr>
-            <a:normAutofit/>
-          </a:bodyPr>
-          <a:lstStyle/>
-          <a:p>
-            <a:r>
-              <a:rPr lang="en-GB" dirty="0"/>
-              <a:t>RESULTS </a:t>
-            </a:r>
-            <a:endParaRPr lang="en-IN" dirty="0"/>
-          </a:p>
-        </p:txBody>
-      </p:sp>
-      <p:sp>
-        <p:nvSpPr>
           <p:cNvPr id="7" name="Text Placeholder 30">
             <a:extLst>
               <a:ext uri="{FF2B5EF4-FFF2-40B4-BE49-F238E27FC236}">
@@ -19770,7 +19598,7 @@
         </p:nvSpPr>
         <p:spPr>
           <a:xfrm>
-            <a:off x="833717" y="1470666"/>
+            <a:off x="675957" y="409545"/>
             <a:ext cx="6051177" cy="400110"/>
           </a:xfrm>
           <a:prstGeom prst="rect">
@@ -19837,8 +19665,8 @@
         </p:blipFill>
         <p:spPr bwMode="auto">
           <a:xfrm>
-            <a:off x="1911085" y="2002642"/>
-            <a:ext cx="4682714" cy="4245758"/>
+            <a:off x="1610056" y="1030938"/>
+            <a:ext cx="4835568" cy="4384349"/>
           </a:xfrm>
           <a:prstGeom prst="rect">
             <a:avLst/>
@@ -19891,118 +19719,19 @@
                             </p:stCondLst>
                             <p:childTnLst>
                               <p:par>
-                                <p:cTn id="5" presetID="53" presetClass="entr" presetSubtype="16" fill="hold" grpId="0" nodeType="clickEffect">
-                                  <p:stCondLst>
-                                    <p:cond delay="0"/>
-                                  </p:stCondLst>
-                                  <p:childTnLst>
-                                    <p:set>
-                                      <p:cBhvr>
-                                        <p:cTn id="6" dur="1" fill="hold">
-                                          <p:stCondLst>
-                                            <p:cond delay="0"/>
-                                          </p:stCondLst>
-                                        </p:cTn>
-                                        <p:tgtEl>
-                                          <p:spTgt spid="4"/>
-                                        </p:tgtEl>
-                                        <p:attrNameLst>
-                                          <p:attrName>style.visibility</p:attrName>
-                                        </p:attrNameLst>
-                                      </p:cBhvr>
-                                      <p:to>
-                                        <p:strVal val="visible"/>
-                                      </p:to>
-                                    </p:set>
-                                    <p:anim calcmode="lin" valueType="num">
-                                      <p:cBhvr>
-                                        <p:cTn id="7" dur="500" fill="hold"/>
-                                        <p:tgtEl>
-                                          <p:spTgt spid="4"/>
-                                        </p:tgtEl>
-                                        <p:attrNameLst>
-                                          <p:attrName>ppt_w</p:attrName>
-                                        </p:attrNameLst>
-                                      </p:cBhvr>
-                                      <p:tavLst>
-                                        <p:tav tm="0">
-                                          <p:val>
-                                            <p:fltVal val="0"/>
-                                          </p:val>
-                                        </p:tav>
-                                        <p:tav tm="100000">
-                                          <p:val>
-                                            <p:strVal val="#ppt_w"/>
-                                          </p:val>
-                                        </p:tav>
-                                      </p:tavLst>
-                                    </p:anim>
-                                    <p:anim calcmode="lin" valueType="num">
-                                      <p:cBhvr>
-                                        <p:cTn id="8" dur="500" fill="hold"/>
-                                        <p:tgtEl>
-                                          <p:spTgt spid="4"/>
-                                        </p:tgtEl>
-                                        <p:attrNameLst>
-                                          <p:attrName>ppt_h</p:attrName>
-                                        </p:attrNameLst>
-                                      </p:cBhvr>
-                                      <p:tavLst>
-                                        <p:tav tm="0">
-                                          <p:val>
-                                            <p:fltVal val="0"/>
-                                          </p:val>
-                                        </p:tav>
-                                        <p:tav tm="100000">
-                                          <p:val>
-                                            <p:strVal val="#ppt_h"/>
-                                          </p:val>
-                                        </p:tav>
-                                      </p:tavLst>
-                                    </p:anim>
-                                    <p:animEffect transition="in" filter="fade">
-                                      <p:cBhvr>
-                                        <p:cTn id="9" dur="500"/>
-                                        <p:tgtEl>
-                                          <p:spTgt spid="4"/>
-                                        </p:tgtEl>
-                                      </p:cBhvr>
-                                    </p:animEffect>
-                                  </p:childTnLst>
-                                </p:cTn>
-                              </p:par>
-                            </p:childTnLst>
-                          </p:cTn>
-                        </p:par>
-                      </p:childTnLst>
-                    </p:cTn>
-                  </p:par>
-                  <p:par>
-                    <p:cTn id="10" fill="hold">
-                      <p:stCondLst>
-                        <p:cond delay="indefinite"/>
-                      </p:stCondLst>
-                      <p:childTnLst>
-                        <p:par>
-                          <p:cTn id="11" fill="hold">
-                            <p:stCondLst>
-                              <p:cond delay="0"/>
-                            </p:stCondLst>
-                            <p:childTnLst>
-                              <p:par>
-                                <p:cTn id="12" presetID="42" presetClass="entr" presetSubtype="0" fill="hold" grpId="0" nodeType="clickEffect" nodePh="1">
+                                <p:cTn id="5" presetID="42" presetClass="entr" presetSubtype="0" fill="hold" grpId="0" nodeType="clickEffect" nodePh="1">
                                   <p:stCondLst>
                                     <p:cond delay="0"/>
                                   </p:stCondLst>
                                   <p:endCondLst>
                                     <p:cond evt="begin" delay="0">
-                                      <p:tn val="12"/>
+                                      <p:tn val="5"/>
                                     </p:cond>
                                   </p:endCondLst>
                                   <p:childTnLst>
                                     <p:set>
                                       <p:cBhvr>
-                                        <p:cTn id="13" dur="1" fill="hold">
+                                        <p:cTn id="6" dur="1" fill="hold">
                                           <p:stCondLst>
                                             <p:cond delay="0"/>
                                           </p:stCondLst>
@@ -20020,7 +19749,7 @@
                                     </p:set>
                                     <p:animEffect transition="in" filter="fade">
                                       <p:cBhvr>
-                                        <p:cTn id="14" dur="1000"/>
+                                        <p:cTn id="7" dur="1000"/>
                                         <p:tgtEl>
                                           <p:spTgt spid="8"/>
                                         </p:tgtEl>
@@ -20028,7 +19757,7 @@
                                     </p:animEffect>
                                     <p:anim calcmode="lin" valueType="num">
                                       <p:cBhvr>
-                                        <p:cTn id="15" dur="1000" fill="hold"/>
+                                        <p:cTn id="8" dur="1000" fill="hold"/>
                                         <p:tgtEl>
                                           <p:spTgt spid="8"/>
                                         </p:tgtEl>
@@ -20051,7 +19780,7 @@
                                     </p:anim>
                                     <p:anim calcmode="lin" valueType="num">
                                       <p:cBhvr>
-                                        <p:cTn id="16" dur="1000" fill="hold"/>
+                                        <p:cTn id="9" dur="1000" fill="hold"/>
                                         <p:tgtEl>
                                           <p:spTgt spid="8"/>
                                         </p:tgtEl>
@@ -20103,7 +19832,6 @@
       </p:par>
     </p:tnLst>
     <p:bldLst>
-      <p:bldP spid="4" grpId="0"/>
       <p:bldP spid="8" grpId="0"/>
     </p:bldLst>
   </p:timing>
@@ -20164,42 +19892,6 @@
       </p:pic>
       <p:sp>
         <p:nvSpPr>
-          <p:cNvPr id="4" name="Title 3">
-            <a:extLst>
-              <a:ext uri="{FF2B5EF4-FFF2-40B4-BE49-F238E27FC236}">
-                <a16:creationId xmlns:a16="http://schemas.microsoft.com/office/drawing/2014/main" id="{8E3CBF8C-56E1-A6BD-B4F3-B2800D5ED7CA}"/>
-              </a:ext>
-            </a:extLst>
-          </p:cNvPr>
-          <p:cNvSpPr>
-            <a:spLocks noGrp="1"/>
-          </p:cNvSpPr>
-          <p:nvPr>
-            <p:ph type="title"/>
-          </p:nvPr>
-        </p:nvSpPr>
-        <p:spPr>
-          <a:xfrm>
-            <a:off x="675957" y="370589"/>
-            <a:ext cx="2981643" cy="830997"/>
-          </a:xfrm>
-        </p:spPr>
-        <p:txBody>
-          <a:bodyPr>
-            <a:normAutofit/>
-          </a:bodyPr>
-          <a:lstStyle/>
-          <a:p>
-            <a:r>
-              <a:rPr lang="en-GB" dirty="0"/>
-              <a:t>RESULTS </a:t>
-            </a:r>
-            <a:endParaRPr lang="en-IN" dirty="0"/>
-          </a:p>
-        </p:txBody>
-      </p:sp>
-      <p:sp>
-        <p:nvSpPr>
           <p:cNvPr id="7" name="Text Placeholder 30">
             <a:extLst>
               <a:ext uri="{FF2B5EF4-FFF2-40B4-BE49-F238E27FC236}">
@@ -20724,7 +20416,7 @@
         </p:nvSpPr>
         <p:spPr>
           <a:xfrm>
-            <a:off x="881001" y="1290618"/>
+            <a:off x="719636" y="534255"/>
             <a:ext cx="6140824" cy="400110"/>
           </a:xfrm>
           <a:prstGeom prst="rect">
@@ -20845,8 +20537,8 @@
         </p:blipFill>
         <p:spPr bwMode="auto">
           <a:xfrm>
-            <a:off x="1026897" y="1825981"/>
-            <a:ext cx="7538719" cy="4178702"/>
+            <a:off x="1000003" y="1222704"/>
+            <a:ext cx="8064033" cy="4469883"/>
           </a:xfrm>
           <a:prstGeom prst="rect">
             <a:avLst/>
@@ -20899,118 +20591,19 @@
                             </p:stCondLst>
                             <p:childTnLst>
                               <p:par>
-                                <p:cTn id="5" presetID="53" presetClass="entr" presetSubtype="16" fill="hold" grpId="0" nodeType="clickEffect">
-                                  <p:stCondLst>
-                                    <p:cond delay="0"/>
-                                  </p:stCondLst>
-                                  <p:childTnLst>
-                                    <p:set>
-                                      <p:cBhvr>
-                                        <p:cTn id="6" dur="1" fill="hold">
-                                          <p:stCondLst>
-                                            <p:cond delay="0"/>
-                                          </p:stCondLst>
-                                        </p:cTn>
-                                        <p:tgtEl>
-                                          <p:spTgt spid="4"/>
-                                        </p:tgtEl>
-                                        <p:attrNameLst>
-                                          <p:attrName>style.visibility</p:attrName>
-                                        </p:attrNameLst>
-                                      </p:cBhvr>
-                                      <p:to>
-                                        <p:strVal val="visible"/>
-                                      </p:to>
-                                    </p:set>
-                                    <p:anim calcmode="lin" valueType="num">
-                                      <p:cBhvr>
-                                        <p:cTn id="7" dur="500" fill="hold"/>
-                                        <p:tgtEl>
-                                          <p:spTgt spid="4"/>
-                                        </p:tgtEl>
-                                        <p:attrNameLst>
-                                          <p:attrName>ppt_w</p:attrName>
-                                        </p:attrNameLst>
-                                      </p:cBhvr>
-                                      <p:tavLst>
-                                        <p:tav tm="0">
-                                          <p:val>
-                                            <p:fltVal val="0"/>
-                                          </p:val>
-                                        </p:tav>
-                                        <p:tav tm="100000">
-                                          <p:val>
-                                            <p:strVal val="#ppt_w"/>
-                                          </p:val>
-                                        </p:tav>
-                                      </p:tavLst>
-                                    </p:anim>
-                                    <p:anim calcmode="lin" valueType="num">
-                                      <p:cBhvr>
-                                        <p:cTn id="8" dur="500" fill="hold"/>
-                                        <p:tgtEl>
-                                          <p:spTgt spid="4"/>
-                                        </p:tgtEl>
-                                        <p:attrNameLst>
-                                          <p:attrName>ppt_h</p:attrName>
-                                        </p:attrNameLst>
-                                      </p:cBhvr>
-                                      <p:tavLst>
-                                        <p:tav tm="0">
-                                          <p:val>
-                                            <p:fltVal val="0"/>
-                                          </p:val>
-                                        </p:tav>
-                                        <p:tav tm="100000">
-                                          <p:val>
-                                            <p:strVal val="#ppt_h"/>
-                                          </p:val>
-                                        </p:tav>
-                                      </p:tavLst>
-                                    </p:anim>
-                                    <p:animEffect transition="in" filter="fade">
-                                      <p:cBhvr>
-                                        <p:cTn id="9" dur="500"/>
-                                        <p:tgtEl>
-                                          <p:spTgt spid="4"/>
-                                        </p:tgtEl>
-                                      </p:cBhvr>
-                                    </p:animEffect>
-                                  </p:childTnLst>
-                                </p:cTn>
-                              </p:par>
-                            </p:childTnLst>
-                          </p:cTn>
-                        </p:par>
-                      </p:childTnLst>
-                    </p:cTn>
-                  </p:par>
-                  <p:par>
-                    <p:cTn id="10" fill="hold">
-                      <p:stCondLst>
-                        <p:cond delay="indefinite"/>
-                      </p:stCondLst>
-                      <p:childTnLst>
-                        <p:par>
-                          <p:cTn id="11" fill="hold">
-                            <p:stCondLst>
-                              <p:cond delay="0"/>
-                            </p:stCondLst>
-                            <p:childTnLst>
-                              <p:par>
-                                <p:cTn id="12" presetID="42" presetClass="entr" presetSubtype="0" fill="hold" grpId="0" nodeType="clickEffect" nodePh="1">
+                                <p:cTn id="5" presetID="42" presetClass="entr" presetSubtype="0" fill="hold" grpId="0" nodeType="clickEffect" nodePh="1">
                                   <p:stCondLst>
                                     <p:cond delay="0"/>
                                   </p:stCondLst>
                                   <p:endCondLst>
                                     <p:cond evt="begin" delay="0">
-                                      <p:tn val="12"/>
+                                      <p:tn val="5"/>
                                     </p:cond>
                                   </p:endCondLst>
                                   <p:childTnLst>
                                     <p:set>
                                       <p:cBhvr>
-                                        <p:cTn id="13" dur="1" fill="hold">
+                                        <p:cTn id="6" dur="1" fill="hold">
                                           <p:stCondLst>
                                             <p:cond delay="0"/>
                                           </p:stCondLst>
@@ -21028,7 +20621,7 @@
                                     </p:set>
                                     <p:animEffect transition="in" filter="fade">
                                       <p:cBhvr>
-                                        <p:cTn id="14" dur="1000"/>
+                                        <p:cTn id="7" dur="1000"/>
                                         <p:tgtEl>
                                           <p:spTgt spid="8"/>
                                         </p:tgtEl>
@@ -21036,7 +20629,7 @@
                                     </p:animEffect>
                                     <p:anim calcmode="lin" valueType="num">
                                       <p:cBhvr>
-                                        <p:cTn id="15" dur="1000" fill="hold"/>
+                                        <p:cTn id="8" dur="1000" fill="hold"/>
                                         <p:tgtEl>
                                           <p:spTgt spid="8"/>
                                         </p:tgtEl>
@@ -21059,7 +20652,7 @@
                                     </p:anim>
                                     <p:anim calcmode="lin" valueType="num">
                                       <p:cBhvr>
-                                        <p:cTn id="16" dur="1000" fill="hold"/>
+                                        <p:cTn id="9" dur="1000" fill="hold"/>
                                         <p:tgtEl>
                                           <p:spTgt spid="8"/>
                                         </p:tgtEl>
@@ -21111,7 +20704,6 @@
       </p:par>
     </p:tnLst>
     <p:bldLst>
-      <p:bldP spid="4" grpId="0"/>
       <p:bldP spid="8" grpId="0"/>
     </p:bldLst>
   </p:timing>
@@ -21172,42 +20764,6 @@
       </p:pic>
       <p:sp>
         <p:nvSpPr>
-          <p:cNvPr id="4" name="Title 3">
-            <a:extLst>
-              <a:ext uri="{FF2B5EF4-FFF2-40B4-BE49-F238E27FC236}">
-                <a16:creationId xmlns:a16="http://schemas.microsoft.com/office/drawing/2014/main" id="{E0F576C3-33DF-7825-6D25-87A25172F801}"/>
-              </a:ext>
-            </a:extLst>
-          </p:cNvPr>
-          <p:cNvSpPr>
-            <a:spLocks noGrp="1"/>
-          </p:cNvSpPr>
-          <p:nvPr>
-            <p:ph type="title"/>
-          </p:nvPr>
-        </p:nvSpPr>
-        <p:spPr>
-          <a:xfrm>
-            <a:off x="675957" y="370589"/>
-            <a:ext cx="2981643" cy="830997"/>
-          </a:xfrm>
-        </p:spPr>
-        <p:txBody>
-          <a:bodyPr>
-            <a:normAutofit/>
-          </a:bodyPr>
-          <a:lstStyle/>
-          <a:p>
-            <a:r>
-              <a:rPr lang="en-GB" dirty="0"/>
-              <a:t>RESULTS </a:t>
-            </a:r>
-            <a:endParaRPr lang="en-IN" dirty="0"/>
-          </a:p>
-        </p:txBody>
-      </p:sp>
-      <p:sp>
-        <p:nvSpPr>
           <p:cNvPr id="7" name="Text Placeholder 30">
             <a:extLst>
               <a:ext uri="{FF2B5EF4-FFF2-40B4-BE49-F238E27FC236}">
@@ -21732,7 +21288,7 @@
         </p:nvSpPr>
         <p:spPr>
           <a:xfrm>
-            <a:off x="881001" y="1290618"/>
+            <a:off x="675957" y="408625"/>
             <a:ext cx="6140824" cy="400110"/>
           </a:xfrm>
           <a:prstGeom prst="rect">
@@ -21853,8 +21409,8 @@
         </p:blipFill>
         <p:spPr bwMode="auto">
           <a:xfrm>
-            <a:off x="1165411" y="1956695"/>
-            <a:ext cx="7396028" cy="4076551"/>
+            <a:off x="1039905" y="1118793"/>
+            <a:ext cx="7404848" cy="4081412"/>
           </a:xfrm>
           <a:prstGeom prst="rect">
             <a:avLst/>
@@ -21907,118 +21463,19 @@
                             </p:stCondLst>
                             <p:childTnLst>
                               <p:par>
-                                <p:cTn id="5" presetID="53" presetClass="entr" presetSubtype="16" fill="hold" grpId="0" nodeType="clickEffect">
-                                  <p:stCondLst>
-                                    <p:cond delay="0"/>
-                                  </p:stCondLst>
-                                  <p:childTnLst>
-                                    <p:set>
-                                      <p:cBhvr>
-                                        <p:cTn id="6" dur="1" fill="hold">
-                                          <p:stCondLst>
-                                            <p:cond delay="0"/>
-                                          </p:stCondLst>
-                                        </p:cTn>
-                                        <p:tgtEl>
-                                          <p:spTgt spid="4"/>
-                                        </p:tgtEl>
-                                        <p:attrNameLst>
-                                          <p:attrName>style.visibility</p:attrName>
-                                        </p:attrNameLst>
-                                      </p:cBhvr>
-                                      <p:to>
-                                        <p:strVal val="visible"/>
-                                      </p:to>
-                                    </p:set>
-                                    <p:anim calcmode="lin" valueType="num">
-                                      <p:cBhvr>
-                                        <p:cTn id="7" dur="500" fill="hold"/>
-                                        <p:tgtEl>
-                                          <p:spTgt spid="4"/>
-                                        </p:tgtEl>
-                                        <p:attrNameLst>
-                                          <p:attrName>ppt_w</p:attrName>
-                                        </p:attrNameLst>
-                                      </p:cBhvr>
-                                      <p:tavLst>
-                                        <p:tav tm="0">
-                                          <p:val>
-                                            <p:fltVal val="0"/>
-                                          </p:val>
-                                        </p:tav>
-                                        <p:tav tm="100000">
-                                          <p:val>
-                                            <p:strVal val="#ppt_w"/>
-                                          </p:val>
-                                        </p:tav>
-                                      </p:tavLst>
-                                    </p:anim>
-                                    <p:anim calcmode="lin" valueType="num">
-                                      <p:cBhvr>
-                                        <p:cTn id="8" dur="500" fill="hold"/>
-                                        <p:tgtEl>
-                                          <p:spTgt spid="4"/>
-                                        </p:tgtEl>
-                                        <p:attrNameLst>
-                                          <p:attrName>ppt_h</p:attrName>
-                                        </p:attrNameLst>
-                                      </p:cBhvr>
-                                      <p:tavLst>
-                                        <p:tav tm="0">
-                                          <p:val>
-                                            <p:fltVal val="0"/>
-                                          </p:val>
-                                        </p:tav>
-                                        <p:tav tm="100000">
-                                          <p:val>
-                                            <p:strVal val="#ppt_h"/>
-                                          </p:val>
-                                        </p:tav>
-                                      </p:tavLst>
-                                    </p:anim>
-                                    <p:animEffect transition="in" filter="fade">
-                                      <p:cBhvr>
-                                        <p:cTn id="9" dur="500"/>
-                                        <p:tgtEl>
-                                          <p:spTgt spid="4"/>
-                                        </p:tgtEl>
-                                      </p:cBhvr>
-                                    </p:animEffect>
-                                  </p:childTnLst>
-                                </p:cTn>
-                              </p:par>
-                            </p:childTnLst>
-                          </p:cTn>
-                        </p:par>
-                      </p:childTnLst>
-                    </p:cTn>
-                  </p:par>
-                  <p:par>
-                    <p:cTn id="10" fill="hold">
-                      <p:stCondLst>
-                        <p:cond delay="indefinite"/>
-                      </p:stCondLst>
-                      <p:childTnLst>
-                        <p:par>
-                          <p:cTn id="11" fill="hold">
-                            <p:stCondLst>
-                              <p:cond delay="0"/>
-                            </p:stCondLst>
-                            <p:childTnLst>
-                              <p:par>
-                                <p:cTn id="12" presetID="42" presetClass="entr" presetSubtype="0" fill="hold" grpId="0" nodeType="clickEffect" nodePh="1">
+                                <p:cTn id="5" presetID="42" presetClass="entr" presetSubtype="0" fill="hold" grpId="0" nodeType="clickEffect" nodePh="1">
                                   <p:stCondLst>
                                     <p:cond delay="0"/>
                                   </p:stCondLst>
                                   <p:endCondLst>
                                     <p:cond evt="begin" delay="0">
-                                      <p:tn val="12"/>
+                                      <p:tn val="5"/>
                                     </p:cond>
                                   </p:endCondLst>
                                   <p:childTnLst>
                                     <p:set>
                                       <p:cBhvr>
-                                        <p:cTn id="13" dur="1" fill="hold">
+                                        <p:cTn id="6" dur="1" fill="hold">
                                           <p:stCondLst>
                                             <p:cond delay="0"/>
                                           </p:stCondLst>
@@ -22036,7 +21493,7 @@
                                     </p:set>
                                     <p:animEffect transition="in" filter="fade">
                                       <p:cBhvr>
-                                        <p:cTn id="14" dur="1000"/>
+                                        <p:cTn id="7" dur="1000"/>
                                         <p:tgtEl>
                                           <p:spTgt spid="8"/>
                                         </p:tgtEl>
@@ -22044,7 +21501,7 @@
                                     </p:animEffect>
                                     <p:anim calcmode="lin" valueType="num">
                                       <p:cBhvr>
-                                        <p:cTn id="15" dur="1000" fill="hold"/>
+                                        <p:cTn id="8" dur="1000" fill="hold"/>
                                         <p:tgtEl>
                                           <p:spTgt spid="8"/>
                                         </p:tgtEl>
@@ -22067,7 +21524,7 @@
                                     </p:anim>
                                     <p:anim calcmode="lin" valueType="num">
                                       <p:cBhvr>
-                                        <p:cTn id="16" dur="1000" fill="hold"/>
+                                        <p:cTn id="9" dur="1000" fill="hold"/>
                                         <p:tgtEl>
                                           <p:spTgt spid="8"/>
                                         </p:tgtEl>
@@ -22119,7 +21576,6 @@
       </p:par>
     </p:tnLst>
     <p:bldLst>
-      <p:bldP spid="4" grpId="0"/>
       <p:bldP spid="8" grpId="0"/>
     </p:bldLst>
   </p:timing>
@@ -22974,15 +22430,6 @@
 </file>
 
 <file path=customXml/item1.xml><?xml version="1.0" encoding="utf-8"?>
-<p:properties xmlns:p="http://schemas.microsoft.com/office/2006/metadata/properties" xmlns:xsi="http://www.w3.org/2001/XMLSchema-instance" xmlns:pc="http://schemas.microsoft.com/office/infopath/2007/PartnerControls">
-  <documentManagement>
-    <Status xmlns="71af3243-3dd4-4a8d-8c0d-dd76da1f02a5">Not started</Status>
-    <MediaServiceKeyPoints xmlns="71af3243-3dd4-4a8d-8c0d-dd76da1f02a5" xsi:nil="true"/>
-  </documentManagement>
-</p:properties>
-</file>
-
-<file path=customXml/item2.xml><?xml version="1.0" encoding="utf-8"?>
 <ct:contentTypeSchema xmlns:ct="http://schemas.microsoft.com/office/2006/metadata/contentType" xmlns:ma="http://schemas.microsoft.com/office/2006/metadata/properties/metaAttributes" ct:_="" ma:_="" ma:contentTypeName="Document" ma:contentTypeID="0x01010079F111ED35F8CC479449609E8A0923A6" ma:contentTypeVersion="12" ma:contentTypeDescription="Create a new document." ma:contentTypeScope="" ma:versionID="426e97fa315356fffbdcd9876fe988c2">
   <xsd:schema xmlns:xsd="http://www.w3.org/2001/XMLSchema" xmlns:xs="http://www.w3.org/2001/XMLSchema" xmlns:p="http://schemas.microsoft.com/office/2006/metadata/properties" xmlns:ns2="71af3243-3dd4-4a8d-8c0d-dd76da1f02a5" xmlns:ns3="16c05727-aa75-4e4a-9b5f-8a80a1165891" targetNamespace="http://schemas.microsoft.com/office/2006/metadata/properties" ma:root="true" ma:fieldsID="14b8f0def80e6d70ce3def20c90759ae" ns2:_="" ns3:_="">
     <xsd:import namespace="71af3243-3dd4-4a8d-8c0d-dd76da1f02a5"/>
@@ -23203,6 +22650,15 @@
 </ct:contentTypeSchema>
 </file>
 
+<file path=customXml/item2.xml><?xml version="1.0" encoding="utf-8"?>
+<p:properties xmlns:p="http://schemas.microsoft.com/office/2006/metadata/properties" xmlns:xsi="http://www.w3.org/2001/XMLSchema-instance" xmlns:pc="http://schemas.microsoft.com/office/infopath/2007/PartnerControls">
+  <documentManagement>
+    <Status xmlns="71af3243-3dd4-4a8d-8c0d-dd76da1f02a5">Not started</Status>
+    <MediaServiceKeyPoints xmlns="71af3243-3dd4-4a8d-8c0d-dd76da1f02a5" xsi:nil="true"/>
+  </documentManagement>
+</p:properties>
+</file>
+
 <file path=customXml/item3.xml><?xml version="1.0" encoding="utf-8"?>
 <?mso-contentType ?>
 <FormTemplates xmlns="http://schemas.microsoft.com/sharepoint/v3/contenttype/forms">
@@ -23213,16 +22669,6 @@
 </file>
 
 <file path=customXml/itemProps1.xml><?xml version="1.0" encoding="utf-8"?>
-<ds:datastoreItem xmlns:ds="http://schemas.openxmlformats.org/officeDocument/2006/customXml" ds:itemID="{4DEA9014-ED64-4558-B1E1-D03F0EE32BEB}">
-  <ds:schemaRefs>
-    <ds:schemaRef ds:uri="http://schemas.microsoft.com/office/2006/metadata/properties"/>
-    <ds:schemaRef ds:uri="http://schemas.microsoft.com/office/infopath/2007/PartnerControls"/>
-    <ds:schemaRef ds:uri="71af3243-3dd4-4a8d-8c0d-dd76da1f02a5"/>
-  </ds:schemaRefs>
-</ds:datastoreItem>
-</file>
-
-<file path=customXml/itemProps2.xml><?xml version="1.0" encoding="utf-8"?>
 <ds:datastoreItem xmlns:ds="http://schemas.openxmlformats.org/officeDocument/2006/customXml" ds:itemID="{B19EB750-A6DA-4BE8-B87B-FC499FE73360}">
   <ds:schemaRefs>
     <ds:schemaRef ds:uri="http://schemas.microsoft.com/office/2006/metadata/contentType"/>
@@ -23241,6 +22687,16 @@
 </ds:datastoreItem>
 </file>
 
+<file path=customXml/itemProps2.xml><?xml version="1.0" encoding="utf-8"?>
+<ds:datastoreItem xmlns:ds="http://schemas.openxmlformats.org/officeDocument/2006/customXml" ds:itemID="{4DEA9014-ED64-4558-B1E1-D03F0EE32BEB}">
+  <ds:schemaRefs>
+    <ds:schemaRef ds:uri="http://schemas.microsoft.com/office/2006/metadata/properties"/>
+    <ds:schemaRef ds:uri="http://schemas.microsoft.com/office/infopath/2007/PartnerControls"/>
+    <ds:schemaRef ds:uri="71af3243-3dd4-4a8d-8c0d-dd76da1f02a5"/>
+  </ds:schemaRefs>
+</ds:datastoreItem>
+</file>
+
 <file path=customXml/itemProps3.xml><?xml version="1.0" encoding="utf-8"?>
 <ds:datastoreItem xmlns:ds="http://schemas.openxmlformats.org/officeDocument/2006/customXml" ds:itemID="{05D99ABA-76CE-4A8E-B5F0-C051B96628DE}">
   <ds:schemaRefs>
